--- a/slides/Part0-Intro/00_01_Apresentação.pptx
+++ b/slides/Part0-Intro/00_01_Apresentação.pptx
@@ -245,7 +245,7 @@
           <a:p>
             <a:fld id="{073928FA-D2C6-41DE-B220-3F2DB2F37ACE}" type="datetimeFigureOut">
               <a:rPr lang="pt-BR" smtClean="0"/>
-              <a:t>14/08/2026</a:t>
+              <a:t>17/08/2026</a:t>
             </a:fld>
             <a:endParaRPr lang="pt-BR"/>
           </a:p>
@@ -410,7 +410,7 @@
           <a:p>
             <a:fld id="{BA67B741-5C22-4E92-9233-564803058EDF}" type="datetimeFigureOut">
               <a:rPr lang="pt-BR" smtClean="0"/>
-              <a:t>14/08/2026</a:t>
+              <a:t>17/08/2026</a:t>
             </a:fld>
             <a:endParaRPr lang="pt-BR"/>
           </a:p>
@@ -3930,17 +3930,17 @@
               <a:t>em</a:t>
             </a:r>
             <a:r>
-              <a:rPr lang="en-US" dirty="0"/>
+              <a:rPr lang="en-US"/>
               <a:t> </a:t>
             </a:r>
             <a:r>
-              <a:rPr lang="en-US" dirty="0">
+              <a:rPr lang="en-US">
                 <a:hlinkClick r:id="rId2"/>
               </a:rPr>
-              <a:t>https://github.com/anollba/comunicacoes_i_ufrj</a:t>
-            </a:r>
-            <a:r>
-              <a:rPr lang="en-US" dirty="0"/>
+              <a:t>https://anollba.github.io/comunicacoes_i_ufrj/</a:t>
+            </a:r>
+            <a:r>
+              <a:rPr lang="en-US"/>
               <a:t> </a:t>
             </a:r>
             <a:endParaRPr lang="en-US" dirty="0">
@@ -6944,6 +6944,15 @@
 </file>
 
 <file path=customXml/item2.xml><?xml version="1.0" encoding="utf-8"?>
+<?mso-contentType ?>
+<FormTemplates xmlns="http://schemas.microsoft.com/sharepoint/v3/contenttype/forms">
+  <Display>DocumentLibraryForm</Display>
+  <Edit>DocumentLibraryForm</Edit>
+  <New>DocumentLibraryForm</New>
+</FormTemplates>
+</file>
+
+<file path=customXml/item3.xml><?xml version="1.0" encoding="utf-8"?>
 <p:properties xmlns:p="http://schemas.microsoft.com/office/2006/metadata/properties" xmlns:xsi="http://www.w3.org/2001/XMLSchema-instance" xmlns:pc="http://schemas.microsoft.com/office/infopath/2007/PartnerControls">
   <documentManagement>
     <PublishingExpirationDate xmlns="http://schemas.microsoft.com/sharepoint/v3" xsi:nil="true"/>
@@ -6955,15 +6964,6 @@
     </lcf76f155ced4ddcb4097134ff3c332f>
   </documentManagement>
 </p:properties>
-</file>
-
-<file path=customXml/item3.xml><?xml version="1.0" encoding="utf-8"?>
-<?mso-contentType ?>
-<FormTemplates xmlns="http://schemas.microsoft.com/sharepoint/v3/contenttype/forms">
-  <Display>DocumentLibraryForm</Display>
-  <Edit>DocumentLibraryForm</Edit>
-  <New>DocumentLibraryForm</New>
-</FormTemplates>
 </file>
 
 <file path=customXml/itemProps1.xml><?xml version="1.0" encoding="utf-8"?>
@@ -6987,6 +6987,14 @@
 </file>
 
 <file path=customXml/itemProps2.xml><?xml version="1.0" encoding="utf-8"?>
+<ds:datastoreItem xmlns:ds="http://schemas.openxmlformats.org/officeDocument/2006/customXml" ds:itemID="{34FEC8D3-7B32-419B-A4A3-EBB3317EEE79}">
+  <ds:schemaRefs>
+    <ds:schemaRef ds:uri="http://schemas.microsoft.com/sharepoint/v3/contenttype/forms"/>
+  </ds:schemaRefs>
+</ds:datastoreItem>
+</file>
+
+<file path=customXml/itemProps3.xml><?xml version="1.0" encoding="utf-8"?>
 <ds:datastoreItem xmlns:ds="http://schemas.openxmlformats.org/officeDocument/2006/customXml" ds:itemID="{279FE441-B5D8-464E-B272-E5E9701C444C}">
   <ds:schemaRefs>
     <ds:schemaRef ds:uri="7338d0ee-48d0-42fd-8eee-cce9c16843bc"/>
@@ -7004,14 +7012,6 @@
 </ds:datastoreItem>
 </file>
 
-<file path=customXml/itemProps3.xml><?xml version="1.0" encoding="utf-8"?>
-<ds:datastoreItem xmlns:ds="http://schemas.openxmlformats.org/officeDocument/2006/customXml" ds:itemID="{34FEC8D3-7B32-419B-A4A3-EBB3317EEE79}">
-  <ds:schemaRefs>
-    <ds:schemaRef ds:uri="http://schemas.microsoft.com/sharepoint/v3/contenttype/forms"/>
-  </ds:schemaRefs>
-</ds:datastoreItem>
-</file>
-
 <file path=docMetadata/LabelInfo.xml><?xml version="1.0" encoding="utf-8"?>
 <clbl:labelList xmlns:clbl="http://schemas.microsoft.com/office/2020/mipLabelMetadata">
   <clbl:label id="{756163f3-60ab-41f6-93dc-6e1b6af775b3}" enabled="1" method="Privileged" siteId="{a5a01691-338c-4b57-812c-24d594995cd6}" removed="0"/>
